--- a/Unity Модуль 1 Урок 1. Структура проекту. Зміні.pptx
+++ b/Unity Модуль 1 Урок 1. Структура проекту. Зміні.pptx
@@ -17614,14 +17614,14 @@
           <p:nvPr>
             <p:extLst>
               <p:ext uri="{D42A27DB-BD31-4B8C-83A1-F6EECF244321}">
-                <p14:modId xmlns:p14="http://schemas.microsoft.com/office/powerpoint/2010/main" val="2010461524"/>
+                <p14:modId xmlns:p14="http://schemas.microsoft.com/office/powerpoint/2010/main" val="3994783441"/>
               </p:ext>
             </p:extLst>
           </p:nvPr>
         </p:nvGraphicFramePr>
         <p:xfrm>
-          <a:off x="1343025" y="143156"/>
-          <a:ext cx="10521950" cy="741680"/>
+          <a:off x="1193006" y="-112712"/>
+          <a:ext cx="10521950" cy="3606800"/>
         </p:xfrm>
         <a:graphic>
           <a:graphicData uri="http://schemas.openxmlformats.org/drawingml/2006/table">
@@ -17728,7 +17728,11 @@
                     <a:bodyPr/>
                     <a:lstStyle/>
                     <a:p>
-                      <a:endParaRPr lang="uk-UA"/>
+                      <a:r>
+                        <a:rPr lang="en-US" dirty="0"/>
+                        <a:t>bool</a:t>
+                      </a:r>
+                      <a:endParaRPr lang="uk-UA" dirty="0"/>
                     </a:p>
                   </a:txBody>
                   <a:tcPr/>
@@ -17738,7 +17742,19 @@
                     <a:bodyPr/>
                     <a:lstStyle/>
                     <a:p>
-                      <a:endParaRPr lang="uk-UA"/>
+                      <a:r>
+                        <a:rPr lang="en-US" dirty="0"/>
+                        <a:t>true</a:t>
+                      </a:r>
+                      <a:r>
+                        <a:rPr lang="uk-UA" dirty="0"/>
+                        <a:t>, </a:t>
+                      </a:r>
+                      <a:r>
+                        <a:rPr lang="en-US" dirty="0"/>
+                        <a:t>false</a:t>
+                      </a:r>
+                      <a:endParaRPr lang="uk-UA" dirty="0"/>
                     </a:p>
                   </a:txBody>
                   <a:tcPr/>
@@ -17758,6 +17774,10 @@
                     <a:bodyPr/>
                     <a:lstStyle/>
                     <a:p>
+                      <a:r>
+                        <a:rPr lang="en-US" dirty="0"/>
+                        <a:t>true</a:t>
+                      </a:r>
                       <a:endParaRPr lang="uk-UA" dirty="0"/>
                     </a:p>
                   </a:txBody>
@@ -17766,6 +17786,411 @@
                 <a:extLst>
                   <a:ext uri="{0D108BD9-81ED-4DB2-BD59-A6C34878D82A}">
                     <a16:rowId xmlns:a16="http://schemas.microsoft.com/office/drawing/2014/main" val="4203325827"/>
+                  </a:ext>
+                </a:extLst>
+              </a:tr>
+              <a:tr h="370840">
+                <a:tc>
+                  <a:txBody>
+                    <a:bodyPr/>
+                    <a:lstStyle/>
+                    <a:p>
+                      <a:r>
+                        <a:rPr lang="en-US" dirty="0"/>
+                        <a:t>char</a:t>
+                      </a:r>
+                      <a:endParaRPr lang="uk-UA" dirty="0"/>
+                    </a:p>
+                  </a:txBody>
+                  <a:tcPr/>
+                </a:tc>
+                <a:tc>
+                  <a:txBody>
+                    <a:bodyPr/>
+                    <a:lstStyle/>
+                    <a:p>
+                      <a:r>
+                        <a:rPr lang="en-US" dirty="0"/>
+                        <a:t>1 symbol</a:t>
+                      </a:r>
+                      <a:endParaRPr lang="uk-UA" dirty="0"/>
+                    </a:p>
+                  </a:txBody>
+                  <a:tcPr/>
+                </a:tc>
+                <a:tc>
+                  <a:txBody>
+                    <a:bodyPr/>
+                    <a:lstStyle/>
+                    <a:p>
+                      <a:endParaRPr lang="uk-UA" dirty="0"/>
+                    </a:p>
+                  </a:txBody>
+                  <a:tcPr/>
+                </a:tc>
+                <a:tc>
+                  <a:txBody>
+                    <a:bodyPr/>
+                    <a:lstStyle/>
+                    <a:p>
+                      <a:r>
+                        <a:rPr lang="en-US" dirty="0"/>
+                        <a:t>‘f’</a:t>
+                      </a:r>
+                      <a:endParaRPr lang="uk-UA" dirty="0"/>
+                    </a:p>
+                  </a:txBody>
+                  <a:tcPr/>
+                </a:tc>
+                <a:extLst>
+                  <a:ext uri="{0D108BD9-81ED-4DB2-BD59-A6C34878D82A}">
+                    <a16:rowId xmlns:a16="http://schemas.microsoft.com/office/drawing/2014/main" val="1153680102"/>
+                  </a:ext>
+                </a:extLst>
+              </a:tr>
+              <a:tr h="370840">
+                <a:tc>
+                  <a:txBody>
+                    <a:bodyPr/>
+                    <a:lstStyle/>
+                    <a:p>
+                      <a:r>
+                        <a:rPr lang="en-US" dirty="0" err="1"/>
+                        <a:t>sbyte</a:t>
+                      </a:r>
+                      <a:r>
+                        <a:rPr lang="en-US" dirty="0"/>
+                        <a:t> </a:t>
+                      </a:r>
+                      <a:endParaRPr lang="uk-UA" dirty="0"/>
+                    </a:p>
+                  </a:txBody>
+                  <a:tcPr/>
+                </a:tc>
+                <a:tc>
+                  <a:txBody>
+                    <a:bodyPr/>
+                    <a:lstStyle/>
+                    <a:p>
+                      <a:r>
+                        <a:rPr lang="uk-UA" dirty="0"/>
+                        <a:t>Число від -128 до 127</a:t>
+                      </a:r>
+                    </a:p>
+                  </a:txBody>
+                  <a:tcPr/>
+                </a:tc>
+                <a:tc>
+                  <a:txBody>
+                    <a:bodyPr/>
+                    <a:lstStyle/>
+                    <a:p>
+                      <a:endParaRPr lang="uk-UA" dirty="0"/>
+                    </a:p>
+                  </a:txBody>
+                  <a:tcPr/>
+                </a:tc>
+                <a:tc>
+                  <a:txBody>
+                    <a:bodyPr/>
+                    <a:lstStyle/>
+                    <a:p>
+                      <a:r>
+                        <a:rPr lang="uk-UA" dirty="0"/>
+                        <a:t>-16</a:t>
+                      </a:r>
+                    </a:p>
+                  </a:txBody>
+                  <a:tcPr/>
+                </a:tc>
+                <a:extLst>
+                  <a:ext uri="{0D108BD9-81ED-4DB2-BD59-A6C34878D82A}">
+                    <a16:rowId xmlns:a16="http://schemas.microsoft.com/office/drawing/2014/main" val="869227001"/>
+                  </a:ext>
+                </a:extLst>
+              </a:tr>
+              <a:tr h="370840">
+                <a:tc>
+                  <a:txBody>
+                    <a:bodyPr/>
+                    <a:lstStyle/>
+                    <a:p>
+                      <a:r>
+                        <a:rPr lang="en-US" dirty="0"/>
+                        <a:t>byte </a:t>
+                      </a:r>
+                      <a:endParaRPr lang="uk-UA" dirty="0"/>
+                    </a:p>
+                  </a:txBody>
+                  <a:tcPr/>
+                </a:tc>
+                <a:tc>
+                  <a:txBody>
+                    <a:bodyPr/>
+                    <a:lstStyle/>
+                    <a:p>
+                      <a:r>
+                        <a:rPr lang="uk-UA" dirty="0"/>
+                        <a:t>Число від 0 до 255</a:t>
+                      </a:r>
+                    </a:p>
+                  </a:txBody>
+                  <a:tcPr/>
+                </a:tc>
+                <a:tc>
+                  <a:txBody>
+                    <a:bodyPr/>
+                    <a:lstStyle/>
+                    <a:p>
+                      <a:endParaRPr lang="uk-UA" dirty="0"/>
+                    </a:p>
+                  </a:txBody>
+                  <a:tcPr/>
+                </a:tc>
+                <a:tc>
+                  <a:txBody>
+                    <a:bodyPr/>
+                    <a:lstStyle/>
+                    <a:p>
+                      <a:r>
+                        <a:rPr lang="uk-UA" dirty="0"/>
+                        <a:t>32</a:t>
+                      </a:r>
+                    </a:p>
+                  </a:txBody>
+                  <a:tcPr/>
+                </a:tc>
+                <a:extLst>
+                  <a:ext uri="{0D108BD9-81ED-4DB2-BD59-A6C34878D82A}">
+                    <a16:rowId xmlns:a16="http://schemas.microsoft.com/office/drawing/2014/main" val="3028910666"/>
+                  </a:ext>
+                </a:extLst>
+              </a:tr>
+              <a:tr h="370840">
+                <a:tc>
+                  <a:txBody>
+                    <a:bodyPr/>
+                    <a:lstStyle/>
+                    <a:p>
+                      <a:r>
+                        <a:rPr lang="en-US" dirty="0"/>
+                        <a:t>short</a:t>
+                      </a:r>
+                      <a:endParaRPr lang="uk-UA" dirty="0"/>
+                    </a:p>
+                  </a:txBody>
+                  <a:tcPr/>
+                </a:tc>
+                <a:tc>
+                  <a:txBody>
+                    <a:bodyPr/>
+                    <a:lstStyle/>
+                    <a:p>
+                      <a:r>
+                        <a:rPr lang="uk-UA" dirty="0"/>
+                        <a:t>Число від -32768 до 32767</a:t>
+                      </a:r>
+                    </a:p>
+                  </a:txBody>
+                  <a:tcPr/>
+                </a:tc>
+                <a:tc>
+                  <a:txBody>
+                    <a:bodyPr/>
+                    <a:lstStyle/>
+                    <a:p>
+                      <a:endParaRPr lang="uk-UA" dirty="0"/>
+                    </a:p>
+                  </a:txBody>
+                  <a:tcPr/>
+                </a:tc>
+                <a:tc>
+                  <a:txBody>
+                    <a:bodyPr/>
+                    <a:lstStyle/>
+                    <a:p>
+                      <a:r>
+                        <a:rPr lang="uk-UA" dirty="0"/>
+                        <a:t>-256</a:t>
+                      </a:r>
+                    </a:p>
+                  </a:txBody>
+                  <a:tcPr/>
+                </a:tc>
+                <a:extLst>
+                  <a:ext uri="{0D108BD9-81ED-4DB2-BD59-A6C34878D82A}">
+                    <a16:rowId xmlns:a16="http://schemas.microsoft.com/office/drawing/2014/main" val="3781055509"/>
+                  </a:ext>
+                </a:extLst>
+              </a:tr>
+              <a:tr h="370840">
+                <a:tc>
+                  <a:txBody>
+                    <a:bodyPr/>
+                    <a:lstStyle/>
+                    <a:p>
+                      <a:r>
+                        <a:rPr lang="en-US" dirty="0" err="1"/>
+                        <a:t>ushort</a:t>
+                      </a:r>
+                      <a:endParaRPr lang="uk-UA" dirty="0"/>
+                    </a:p>
+                  </a:txBody>
+                  <a:tcPr/>
+                </a:tc>
+                <a:tc>
+                  <a:txBody>
+                    <a:bodyPr/>
+                    <a:lstStyle/>
+                    <a:p>
+                      <a:r>
+                        <a:rPr lang="uk-UA" dirty="0"/>
+                        <a:t>Число від 0 до 65535</a:t>
+                      </a:r>
+                    </a:p>
+                  </a:txBody>
+                  <a:tcPr/>
+                </a:tc>
+                <a:tc>
+                  <a:txBody>
+                    <a:bodyPr/>
+                    <a:lstStyle/>
+                    <a:p>
+                      <a:endParaRPr lang="uk-UA" dirty="0"/>
+                    </a:p>
+                  </a:txBody>
+                  <a:tcPr/>
+                </a:tc>
+                <a:tc>
+                  <a:txBody>
+                    <a:bodyPr/>
+                    <a:lstStyle/>
+                    <a:p>
+                      <a:r>
+                        <a:rPr lang="uk-UA" dirty="0"/>
+                        <a:t>60000</a:t>
+                      </a:r>
+                    </a:p>
+                  </a:txBody>
+                  <a:tcPr/>
+                </a:tc>
+                <a:extLst>
+                  <a:ext uri="{0D108BD9-81ED-4DB2-BD59-A6C34878D82A}">
+                    <a16:rowId xmlns:a16="http://schemas.microsoft.com/office/drawing/2014/main" val="1637854811"/>
+                  </a:ext>
+                </a:extLst>
+              </a:tr>
+              <a:tr h="370840">
+                <a:tc>
+                  <a:txBody>
+                    <a:bodyPr/>
+                    <a:lstStyle/>
+                    <a:p>
+                      <a:r>
+                        <a:rPr lang="en-US" dirty="0"/>
+                        <a:t>int</a:t>
+                      </a:r>
+                      <a:endParaRPr lang="uk-UA" dirty="0"/>
+                    </a:p>
+                  </a:txBody>
+                  <a:tcPr/>
+                </a:tc>
+                <a:tc>
+                  <a:txBody>
+                    <a:bodyPr/>
+                    <a:lstStyle/>
+                    <a:p>
+                      <a:r>
+                        <a:rPr lang="uk-UA" dirty="0"/>
+                        <a:t>Число від -2147483648 до 2147483647</a:t>
+                      </a:r>
+                    </a:p>
+                  </a:txBody>
+                  <a:tcPr/>
+                </a:tc>
+                <a:tc>
+                  <a:txBody>
+                    <a:bodyPr/>
+                    <a:lstStyle/>
+                    <a:p>
+                      <a:endParaRPr lang="uk-UA" dirty="0"/>
+                    </a:p>
+                  </a:txBody>
+                  <a:tcPr/>
+                </a:tc>
+                <a:tc>
+                  <a:txBody>
+                    <a:bodyPr/>
+                    <a:lstStyle/>
+                    <a:p>
+                      <a:r>
+                        <a:rPr lang="uk-UA" dirty="0"/>
+                        <a:t>-200000</a:t>
+                      </a:r>
+                    </a:p>
+                  </a:txBody>
+                  <a:tcPr/>
+                </a:tc>
+                <a:extLst>
+                  <a:ext uri="{0D108BD9-81ED-4DB2-BD59-A6C34878D82A}">
+                    <a16:rowId xmlns:a16="http://schemas.microsoft.com/office/drawing/2014/main" val="1121880915"/>
+                  </a:ext>
+                </a:extLst>
+              </a:tr>
+              <a:tr h="370840">
+                <a:tc>
+                  <a:txBody>
+                    <a:bodyPr/>
+                    <a:lstStyle/>
+                    <a:p>
+                      <a:r>
+                        <a:rPr lang="en-US" dirty="0" err="1"/>
+                        <a:t>uint</a:t>
+                      </a:r>
+                      <a:endParaRPr lang="uk-UA" dirty="0"/>
+                    </a:p>
+                  </a:txBody>
+                  <a:tcPr/>
+                </a:tc>
+                <a:tc>
+                  <a:txBody>
+                    <a:bodyPr/>
+                    <a:lstStyle/>
+                    <a:p>
+                      <a:r>
+                        <a:rPr lang="uk-UA" dirty="0"/>
+                        <a:t>Число від 0 до 4294967295</a:t>
+                      </a:r>
+                    </a:p>
+                  </a:txBody>
+                  <a:tcPr/>
+                </a:tc>
+                <a:tc>
+                  <a:txBody>
+                    <a:bodyPr/>
+                    <a:lstStyle/>
+                    <a:p>
+                      <a:endParaRPr lang="uk-UA" dirty="0"/>
+                    </a:p>
+                  </a:txBody>
+                  <a:tcPr/>
+                </a:tc>
+                <a:tc>
+                  <a:txBody>
+                    <a:bodyPr/>
+                    <a:lstStyle/>
+                    <a:p>
+                      <a:r>
+                        <a:rPr lang="uk-UA" dirty="0"/>
+                        <a:t>2000000</a:t>
+                      </a:r>
+                    </a:p>
+                  </a:txBody>
+                  <a:tcPr/>
+                </a:tc>
+                <a:extLst>
+                  <a:ext uri="{0D108BD9-81ED-4DB2-BD59-A6C34878D82A}">
+                    <a16:rowId xmlns:a16="http://schemas.microsoft.com/office/drawing/2014/main" val="329597661"/>
                   </a:ext>
                 </a:extLst>
               </a:tr>
